--- a/public/clients/rxvp/projects/amplify-collateral/RxVP-Amplify-Program.pptx
+++ b/public/clients/rxvp/projects/amplify-collateral/RxVP-Amplify-Program.pptx
@@ -1227,8 +1227,8 @@
         </p:nvSpPr>
         <p:spPr>
           <a:xfrm>
-            <a:off x="475488" y="1444752"/>
-            <a:ext cx="3127248" cy="566928"/>
+            <a:off x="475488" y="1554480"/>
+            <a:ext cx="3127248" cy="585216"/>
           </a:xfrm>
           <a:prstGeom prst="rect">
             <a:avLst/>
@@ -1254,7 +1254,7 @@
                 <a:ea typeface="Cormorant Garamond" pitchFamily="34" charset="-122"/>
                 <a:cs typeface="Cormorant Garamond" pitchFamily="34" charset="-120"/>
               </a:rPr>
-              <a:t>Executive presence and high-impact</a:t>
+              <a:t>High-impact</a:t>
             </a:r>
             <a:endParaRPr lang="en-US" sz="1450" dirty="0"/>
           </a:p>
@@ -1615,7 +1615,7 @@
         <p:spPr>
           <a:xfrm>
             <a:off x="457200" y="4617720"/>
-            <a:ext cx="3273552" cy="667512"/>
+            <a:ext cx="3273552" cy="786384"/>
           </a:xfrm>
           <a:prstGeom prst="rect">
             <a:avLst/>
@@ -1642,7 +1642,7 @@
         <p:spPr>
           <a:xfrm>
             <a:off x="457200" y="4617720"/>
-            <a:ext cx="36576" cy="667512"/>
+            <a:ext cx="36576" cy="786384"/>
           </a:xfrm>
           <a:prstGeom prst="rect">
             <a:avLst/>
@@ -1668,8 +1668,8 @@
         </p:nvSpPr>
         <p:spPr>
           <a:xfrm>
-            <a:off x="603504" y="4718304"/>
-            <a:ext cx="2907792" cy="438912"/>
+            <a:off x="603504" y="4700016"/>
+            <a:ext cx="2999232" cy="676656"/>
           </a:xfrm>
           <a:prstGeom prst="rect">
             <a:avLst/>
@@ -1687,7 +1687,7 @@
               <a:buNone/>
             </a:pPr>
             <a:r>
-              <a:rPr lang="en-US" sz="790" b="1" dirty="0">
+              <a:rPr lang="en-US" sz="920" b="1" dirty="0">
                 <a:solidFill>
                   <a:srgbClr val="241F27"/>
                 </a:solidFill>
@@ -1697,14 +1697,14 @@
               </a:rPr>
               <a:t>RxVP panels</a:t>
             </a:r>
-            <a:endParaRPr lang="en-US" sz="790" dirty="0"/>
-          </a:p>
-          <a:p>
-            <a:pPr algn="l" indent="0" marL="0">
-              <a:buNone/>
-            </a:pPr>
-            <a:r>
-              <a:rPr lang="en-US" sz="790" b="1" dirty="0">
+            <a:endParaRPr lang="en-US" sz="920" dirty="0"/>
+          </a:p>
+          <a:p>
+            <a:pPr algn="l" indent="0" marL="0">
+              <a:buNone/>
+            </a:pPr>
+            <a:r>
+              <a:rPr lang="en-US" sz="920" b="1" dirty="0">
                 <a:solidFill>
                   <a:srgbClr val="241F27"/>
                 </a:solidFill>
@@ -1714,14 +1714,14 @@
               </a:rPr>
               <a:t>RxVP fireside chats</a:t>
             </a:r>
-            <a:endParaRPr lang="en-US" sz="790" dirty="0"/>
-          </a:p>
-          <a:p>
-            <a:pPr algn="l" indent="0" marL="0">
-              <a:buNone/>
-            </a:pPr>
-            <a:r>
-              <a:rPr lang="en-US" sz="790" b="1" dirty="0">
+            <a:endParaRPr lang="en-US" sz="920" dirty="0"/>
+          </a:p>
+          <a:p>
+            <a:pPr algn="l" indent="0" marL="0">
+              <a:buNone/>
+            </a:pPr>
+            <a:r>
+              <a:rPr lang="en-US" sz="920" b="1" dirty="0">
                 <a:solidFill>
                   <a:srgbClr val="241F27"/>
                 </a:solidFill>
@@ -1731,14 +1731,14 @@
               </a:rPr>
               <a:t>Strategic stakeholder engagements</a:t>
             </a:r>
-            <a:endParaRPr lang="en-US" sz="790" dirty="0"/>
-          </a:p>
-          <a:p>
-            <a:pPr algn="l" indent="0" marL="0">
-              <a:buNone/>
-            </a:pPr>
-            <a:r>
-              <a:rPr lang="en-US" sz="790" b="1" dirty="0">
+            <a:endParaRPr lang="en-US" sz="920" dirty="0"/>
+          </a:p>
+          <a:p>
+            <a:pPr algn="l" indent="0" marL="0">
+              <a:buNone/>
+            </a:pPr>
+            <a:r>
+              <a:rPr lang="en-US" sz="920" b="1" dirty="0">
                 <a:solidFill>
                   <a:srgbClr val="241F27"/>
                 </a:solidFill>
@@ -1748,14 +1748,14 @@
               </a:rPr>
               <a:t>Industry conferences</a:t>
             </a:r>
-            <a:endParaRPr lang="en-US" sz="790" dirty="0"/>
-          </a:p>
-          <a:p>
-            <a:pPr algn="l" indent="0" marL="0">
-              <a:buNone/>
-            </a:pPr>
-            <a:r>
-              <a:rPr lang="en-US" sz="790" b="1" dirty="0">
+            <a:endParaRPr lang="en-US" sz="920" dirty="0"/>
+          </a:p>
+          <a:p>
+            <a:pPr algn="l" indent="0" marL="0">
+              <a:buNone/>
+            </a:pPr>
+            <a:r>
+              <a:rPr lang="en-US" sz="920" b="1" dirty="0">
                 <a:solidFill>
                   <a:srgbClr val="241F27"/>
                 </a:solidFill>
@@ -1765,7 +1765,7 @@
               </a:rPr>
               <a:t>RxVP/ERG collaborations</a:t>
             </a:r>
-            <a:endParaRPr lang="en-US" sz="790" dirty="0"/>
+            <a:endParaRPr lang="en-US" sz="920" dirty="0"/>
           </a:p>
         </p:txBody>
       </p:sp>
@@ -1975,8 +1975,8 @@
         </p:nvSpPr>
         <p:spPr>
           <a:xfrm>
-            <a:off x="457200" y="6080760"/>
-            <a:ext cx="6858000" cy="3319272"/>
+            <a:off x="457200" y="6108192"/>
+            <a:ext cx="6858000" cy="3291840"/>
           </a:xfrm>
           <a:prstGeom prst="rect">
             <a:avLst/>
@@ -2000,8 +2000,8 @@
         </p:nvSpPr>
         <p:spPr>
           <a:xfrm>
-            <a:off x="603504" y="6217920"/>
-            <a:ext cx="3291840" cy="164592"/>
+            <a:off x="603504" y="6254496"/>
+            <a:ext cx="3291840" cy="182880"/>
           </a:xfrm>
           <a:prstGeom prst="rect">
             <a:avLst/>
@@ -2019,7 +2019,7 @@
               <a:buNone/>
             </a:pPr>
             <a:r>
-              <a:rPr lang="en-US" sz="900" b="1" dirty="0">
+              <a:rPr lang="en-US" sz="980" b="1" dirty="0">
                 <a:solidFill>
                   <a:srgbClr val="4A075C"/>
                 </a:solidFill>
@@ -2027,9 +2027,9 @@
                 <a:ea typeface="Montserrat" pitchFamily="34" charset="-122"/>
                 <a:cs typeface="Montserrat" pitchFamily="34" charset="-120"/>
               </a:rPr>
-              <a:t>OUR PRACTITIONER COACHES</a:t>
-            </a:r>
-            <a:endParaRPr lang="en-US" sz="900" dirty="0"/>
+              <a:t>PROGRAM OBJECTIVES</a:t>
+            </a:r>
+            <a:endParaRPr lang="en-US" sz="980" dirty="0"/>
           </a:p>
         </p:txBody>
       </p:sp>
@@ -2041,8 +2041,8 @@
         </p:nvSpPr>
         <p:spPr>
           <a:xfrm>
-            <a:off x="603504" y="6510528"/>
-            <a:ext cx="3063240" cy="228600"/>
+            <a:off x="603504" y="6528816"/>
+            <a:ext cx="3246120" cy="2651760"/>
           </a:xfrm>
           <a:prstGeom prst="rect">
             <a:avLst/>
@@ -2051,7 +2051,7 @@
           <a:ln/>
         </p:spPr>
         <p:txBody>
-          <a:bodyPr wrap="square" lIns="127" tIns="127" rIns="127" bIns="127" rtlCol="0" anchor="t">
+          <a:bodyPr wrap="square" lIns="254" tIns="254" rIns="254" bIns="254" rtlCol="0" anchor="t">
             <a:normAutofit/>
           </a:bodyPr>
           <a:lstStyle/>
@@ -2060,53 +2060,64 @@
               <a:buNone/>
             </a:pPr>
             <a:r>
-              <a:rPr lang="en-US" sz="1350" b="1" dirty="0">
-                <a:solidFill>
-                  <a:srgbClr val="4A075C"/>
-                </a:solidFill>
-                <a:latin typeface="Georgia" pitchFamily="34" charset="0"/>
-                <a:ea typeface="Georgia" pitchFamily="34" charset="-122"/>
-                <a:cs typeface="Georgia" pitchFamily="34" charset="-120"/>
-              </a:rPr>
-              <a:t>Deepa Desai</a:t>
-            </a:r>
-            <a:endParaRPr lang="en-US" sz="1350" dirty="0"/>
-          </a:p>
-        </p:txBody>
-      </p:sp>
-      <p:sp>
-        <p:nvSpPr>
-          <p:cNvPr id="29" name="Shape 26"/>
-          <p:cNvSpPr/>
-          <p:nvPr/>
-        </p:nvSpPr>
-        <p:spPr>
-          <a:xfrm>
-            <a:off x="603504" y="6830568"/>
-            <a:ext cx="2999232" cy="0"/>
-          </a:xfrm>
-          <a:prstGeom prst="line">
-            <a:avLst/>
-          </a:prstGeom>
-          <a:noFill/>
-          <a:ln w="12700">
-            <a:solidFill>
-              <a:srgbClr val="DED2E2"/>
-            </a:solidFill>
-            <a:prstDash val="solid"/>
-          </a:ln>
-        </p:spPr>
-      </p:sp>
-      <p:sp>
-        <p:nvSpPr>
-          <p:cNvPr id="30" name="Text 27"/>
-          <p:cNvSpPr/>
-          <p:nvPr/>
-        </p:nvSpPr>
-        <p:spPr>
-          <a:xfrm>
-            <a:off x="603504" y="6922008"/>
-            <a:ext cx="3063240" cy="2148840"/>
+              <a:rPr lang="en-US" sz="920" b="1" dirty="0">
+                <a:solidFill>
+                  <a:srgbClr val="241F27"/>
+                </a:solidFill>
+                <a:latin typeface="Montserrat" pitchFamily="34" charset="0"/>
+                <a:ea typeface="Montserrat" pitchFamily="34" charset="-122"/>
+                <a:cs typeface="Montserrat" pitchFamily="34" charset="-120"/>
+              </a:rPr>
+              <a:t>• Communicate with executive-level confidence and credibility in internal meetings</a:t>
+            </a:r>
+            <a:endParaRPr lang="en-US" sz="920" dirty="0"/>
+          </a:p>
+          <a:p>
+            <a:pPr algn="l" indent="0" marL="0">
+              <a:buNone/>
+            </a:pPr>
+            <a:r>
+              <a:rPr lang="en-US" sz="920" b="1" dirty="0">
+                <a:solidFill>
+                  <a:srgbClr val="241F27"/>
+                </a:solidFill>
+                <a:latin typeface="Montserrat" pitchFamily="34" charset="0"/>
+                <a:ea typeface="Montserrat" pitchFamily="34" charset="-122"/>
+                <a:cs typeface="Montserrat" pitchFamily="34" charset="-120"/>
+              </a:rPr>
+              <a:t>• Strengthen leadership presence in high-visibility forums</a:t>
+            </a:r>
+            <a:endParaRPr lang="en-US" sz="920" dirty="0"/>
+          </a:p>
+          <a:p>
+            <a:pPr algn="l" indent="0" marL="0">
+              <a:buNone/>
+            </a:pPr>
+            <a:r>
+              <a:rPr lang="en-US" sz="920" b="1" dirty="0">
+                <a:solidFill>
+                  <a:srgbClr val="241F27"/>
+                </a:solidFill>
+                <a:latin typeface="Montserrat" pitchFamily="34" charset="0"/>
+                <a:ea typeface="Montserrat" pitchFamily="34" charset="-122"/>
+                <a:cs typeface="Montserrat" pitchFamily="34" charset="-120"/>
+              </a:rPr>
+              <a:t>• Deliver clear, concise, and compelling messages under pressure</a:t>
+            </a:r>
+            <a:endParaRPr lang="en-US" sz="920" dirty="0"/>
+          </a:p>
+        </p:txBody>
+      </p:sp>
+      <p:sp>
+        <p:nvSpPr>
+          <p:cNvPr id="29" name="Text 26"/>
+          <p:cNvSpPr/>
+          <p:nvPr/>
+        </p:nvSpPr>
+        <p:spPr>
+          <a:xfrm>
+            <a:off x="3886200" y="6528816"/>
+            <a:ext cx="3374136" cy="2651760"/>
           </a:xfrm>
           <a:prstGeom prst="rect">
             <a:avLst/>
@@ -2115,7 +2126,7 @@
           <a:ln/>
         </p:spPr>
         <p:txBody>
-          <a:bodyPr wrap="square" lIns="127" tIns="127" rIns="127" bIns="127" rtlCol="0" anchor="t">
+          <a:bodyPr wrap="square" lIns="254" tIns="254" rIns="254" bIns="254" rtlCol="0" anchor="t">
             <a:normAutofit/>
           </a:bodyPr>
           <a:lstStyle/>
@@ -2124,283 +2135,51 @@
               <a:buNone/>
             </a:pPr>
             <a:r>
-              <a:rPr lang="en-US" sz="720" b="1" dirty="0">
-                <a:solidFill>
-                  <a:srgbClr val="756D79"/>
-                </a:solidFill>
-                <a:latin typeface="Montserrat" pitchFamily="34" charset="0"/>
-                <a:ea typeface="Montserrat" pitchFamily="34" charset="-122"/>
-                <a:cs typeface="Montserrat" pitchFamily="34" charset="-120"/>
-              </a:rPr>
-              <a:t>Dr. Deepa Desai is a globally recognized healthcare executive, public speaker, leadership strategist, and executive presence advisor with more than 20 years of experience leading transformation across the life sciences sector.</a:t>
-            </a:r>
-            <a:endParaRPr lang="en-US" sz="720" dirty="0"/>
-          </a:p>
-          <a:p>
-            <a:pPr algn="l" indent="0" marL="0">
-              <a:buNone/>
-            </a:pPr>
-            <a:endParaRPr lang="en-US" sz="720" dirty="0"/>
-          </a:p>
-          <a:p>
-            <a:pPr algn="l" indent="0" marL="0">
-              <a:buNone/>
-            </a:pPr>
-            <a:r>
-              <a:rPr lang="en-US" sz="720" b="1" dirty="0">
-                <a:solidFill>
-                  <a:srgbClr val="756D79"/>
-                </a:solidFill>
-                <a:latin typeface="Montserrat" pitchFamily="34" charset="0"/>
-                <a:ea typeface="Montserrat" pitchFamily="34" charset="-122"/>
-                <a:cs typeface="Montserrat" pitchFamily="34" charset="-120"/>
-              </a:rPr>
-              <a:t>She serves as Founder and CEO of D Cube Consultancy, Head of Asia Pacific for RxVP, Global Board Director at the Healthcare Businesswomen's Association, and has held numerous VP roles in major corporations.</a:t>
-            </a:r>
-            <a:endParaRPr lang="en-US" sz="720" dirty="0"/>
-          </a:p>
-          <a:p>
-            <a:pPr algn="l" indent="0" marL="0">
-              <a:buNone/>
-            </a:pPr>
-            <a:endParaRPr lang="en-US" sz="720" dirty="0"/>
-          </a:p>
-          <a:p>
-            <a:pPr algn="l" indent="0" marL="0">
-              <a:buNone/>
-            </a:pPr>
-            <a:r>
-              <a:rPr lang="en-US" sz="720" b="1" dirty="0">
-                <a:solidFill>
-                  <a:srgbClr val="756D79"/>
-                </a:solidFill>
-                <a:latin typeface="Montserrat" pitchFamily="34" charset="0"/>
-                <a:ea typeface="Montserrat" pitchFamily="34" charset="-122"/>
-                <a:cs typeface="Montserrat" pitchFamily="34" charset="-120"/>
-              </a:rPr>
-              <a:t>Through these leadership roles, she helps emerging leaders strengthen executive presence, elevate strategic communication, and speak with confidence, credibility, and influence.</a:t>
-            </a:r>
-            <a:endParaRPr lang="en-US" sz="720" dirty="0"/>
-          </a:p>
-          <a:p>
-            <a:pPr algn="l" indent="0" marL="0">
-              <a:buNone/>
-            </a:pPr>
-            <a:endParaRPr lang="en-US" sz="720" dirty="0"/>
-          </a:p>
-          <a:p>
-            <a:pPr algn="l" indent="0" marL="0">
-              <a:buNone/>
-            </a:pPr>
-            <a:r>
-              <a:rPr lang="en-US" sz="720" b="1" dirty="0">
-                <a:solidFill>
-                  <a:srgbClr val="756D79"/>
-                </a:solidFill>
-                <a:latin typeface="Montserrat" pitchFamily="34" charset="0"/>
-                <a:ea typeface="Montserrat" pitchFamily="34" charset="-122"/>
-                <a:cs typeface="Montserrat" pitchFamily="34" charset="-120"/>
-              </a:rPr>
-              <a:t>Deepa is a frequent speaker at life sciences conferences and leadership forums across the United States and Europe. She has also expanded the Healthcare Businesswomen’s Association in India to a growing community of 700 members by building panels, summits, and chapters across the country.</a:t>
-            </a:r>
-            <a:endParaRPr lang="en-US" sz="720" dirty="0"/>
-          </a:p>
-        </p:txBody>
-      </p:sp>
-      <p:sp>
-        <p:nvSpPr>
-          <p:cNvPr id="31" name="Text 28"/>
-          <p:cNvSpPr/>
-          <p:nvPr/>
-        </p:nvSpPr>
-        <p:spPr>
-          <a:xfrm>
-            <a:off x="3877056" y="6510528"/>
-            <a:ext cx="3063240" cy="228600"/>
-          </a:xfrm>
-          <a:prstGeom prst="rect">
-            <a:avLst/>
-          </a:prstGeom>
-          <a:noFill/>
-          <a:ln/>
-        </p:spPr>
-        <p:txBody>
-          <a:bodyPr wrap="square" lIns="127" tIns="127" rIns="127" bIns="127" rtlCol="0" anchor="t">
-            <a:normAutofit/>
-          </a:bodyPr>
-          <a:lstStyle/>
-          <a:p>
-            <a:pPr algn="l" indent="0" marL="0">
-              <a:buNone/>
-            </a:pPr>
-            <a:r>
-              <a:rPr lang="en-US" sz="1350" b="1" dirty="0">
-                <a:solidFill>
-                  <a:srgbClr val="4A075C"/>
-                </a:solidFill>
-                <a:latin typeface="Georgia" pitchFamily="34" charset="0"/>
-                <a:ea typeface="Georgia" pitchFamily="34" charset="-122"/>
-                <a:cs typeface="Georgia" pitchFamily="34" charset="-120"/>
-              </a:rPr>
-              <a:t>Bonnie Lappin</a:t>
-            </a:r>
-            <a:endParaRPr lang="en-US" sz="1350" dirty="0"/>
-          </a:p>
-        </p:txBody>
-      </p:sp>
-      <p:sp>
-        <p:nvSpPr>
-          <p:cNvPr id="32" name="Shape 29"/>
-          <p:cNvSpPr/>
-          <p:nvPr/>
-        </p:nvSpPr>
-        <p:spPr>
-          <a:xfrm>
-            <a:off x="3877056" y="6830568"/>
-            <a:ext cx="2999232" cy="0"/>
-          </a:xfrm>
-          <a:prstGeom prst="line">
-            <a:avLst/>
-          </a:prstGeom>
-          <a:noFill/>
-          <a:ln w="12700">
-            <a:solidFill>
-              <a:srgbClr val="DED2E2"/>
-            </a:solidFill>
-            <a:prstDash val="solid"/>
-          </a:ln>
-        </p:spPr>
-      </p:sp>
-      <p:sp>
-        <p:nvSpPr>
-          <p:cNvPr id="33" name="Text 30"/>
-          <p:cNvSpPr/>
-          <p:nvPr/>
-        </p:nvSpPr>
-        <p:spPr>
-          <a:xfrm>
-            <a:off x="3877056" y="6922008"/>
-            <a:ext cx="3063240" cy="2148840"/>
-          </a:xfrm>
-          <a:prstGeom prst="rect">
-            <a:avLst/>
-          </a:prstGeom>
-          <a:noFill/>
-          <a:ln/>
-        </p:spPr>
-        <p:txBody>
-          <a:bodyPr wrap="square" lIns="127" tIns="127" rIns="127" bIns="127" rtlCol="0" anchor="t">
-            <a:normAutofit/>
-          </a:bodyPr>
-          <a:lstStyle/>
-          <a:p>
-            <a:pPr algn="l" indent="0" marL="0">
-              <a:buNone/>
-            </a:pPr>
-            <a:r>
-              <a:rPr lang="en-US" sz="720" b="1" dirty="0">
-                <a:solidFill>
-                  <a:srgbClr val="756D79"/>
-                </a:solidFill>
-                <a:latin typeface="Montserrat" pitchFamily="34" charset="0"/>
-                <a:ea typeface="Montserrat" pitchFamily="34" charset="-122"/>
-                <a:cs typeface="Montserrat" pitchFamily="34" charset="-120"/>
-              </a:rPr>
-              <a:t>Bonnie Lappin co-founded the Ambassador Program for the Healthcare Businesswomen's Association in 2013.</a:t>
-            </a:r>
-            <a:endParaRPr lang="en-US" sz="720" dirty="0"/>
-          </a:p>
-          <a:p>
-            <a:pPr algn="l" indent="0" marL="0">
-              <a:buNone/>
-            </a:pPr>
-            <a:endParaRPr lang="en-US" sz="720" dirty="0"/>
-          </a:p>
-          <a:p>
-            <a:pPr algn="l" indent="0" marL="0">
-              <a:buNone/>
-            </a:pPr>
-            <a:r>
-              <a:rPr lang="en-US" sz="720" b="1" dirty="0">
-                <a:solidFill>
-                  <a:srgbClr val="756D79"/>
-                </a:solidFill>
-                <a:latin typeface="Montserrat" pitchFamily="34" charset="0"/>
-                <a:ea typeface="Montserrat" pitchFamily="34" charset="-122"/>
-                <a:cs typeface="Montserrat" pitchFamily="34" charset="-120"/>
-              </a:rPr>
-              <a:t>Designed as a global leadership development program for HBA corporate partners, it grew under her leadership from 2013 to 2025 into a signature, often life-changing experience for more than 11,000 participants.</a:t>
-            </a:r>
-            <a:endParaRPr lang="en-US" sz="720" dirty="0"/>
-          </a:p>
-          <a:p>
-            <a:pPr algn="l" indent="0" marL="0">
-              <a:buNone/>
-            </a:pPr>
-            <a:endParaRPr lang="en-US" sz="720" dirty="0"/>
-          </a:p>
-          <a:p>
-            <a:pPr algn="l" indent="0" marL="0">
-              <a:buNone/>
-            </a:pPr>
-            <a:r>
-              <a:rPr lang="en-US" sz="720" b="1" dirty="0">
-                <a:solidFill>
-                  <a:srgbClr val="756D79"/>
-                </a:solidFill>
-                <a:latin typeface="Montserrat" pitchFamily="34" charset="0"/>
-                <a:ea typeface="Montserrat" pitchFamily="34" charset="-122"/>
-                <a:cs typeface="Montserrat" pitchFamily="34" charset="-120"/>
-              </a:rPr>
-              <a:t>Over those 12 years, Bonnie spoke frequently at life sciences companies across Austria, Belgium, Canada, France, Germany, India, Ireland, Italy, Japan, Malaysia, Singapore, Spain, Switzerland, and the United Kingdom.</a:t>
-            </a:r>
-            <a:endParaRPr lang="en-US" sz="720" dirty="0"/>
-          </a:p>
-          <a:p>
-            <a:pPr algn="l" indent="0" marL="0">
-              <a:buNone/>
-            </a:pPr>
-            <a:endParaRPr lang="en-US" sz="720" dirty="0"/>
-          </a:p>
-          <a:p>
-            <a:pPr algn="l" indent="0" marL="0">
-              <a:buNone/>
-            </a:pPr>
-            <a:r>
-              <a:rPr lang="en-US" sz="720" b="1" dirty="0">
-                <a:solidFill>
-                  <a:srgbClr val="756D79"/>
-                </a:solidFill>
-                <a:latin typeface="Montserrat" pitchFamily="34" charset="0"/>
-                <a:ea typeface="Montserrat" pitchFamily="34" charset="-122"/>
-                <a:cs typeface="Montserrat" pitchFamily="34" charset="-120"/>
-              </a:rPr>
-              <a:t>She also led panel development, launch and graduation events, and coached hundreds of panelists and moderators.</a:t>
-            </a:r>
-            <a:endParaRPr lang="en-US" sz="720" dirty="0"/>
-          </a:p>
-          <a:p>
-            <a:pPr algn="l" indent="0" marL="0">
-              <a:buNone/>
-            </a:pPr>
-            <a:endParaRPr lang="en-US" sz="720" dirty="0"/>
-          </a:p>
-          <a:p>
-            <a:pPr algn="l" indent="0" marL="0">
-              <a:buNone/>
-            </a:pPr>
-            <a:r>
-              <a:rPr lang="en-US" sz="720" b="1" dirty="0">
-                <a:solidFill>
-                  <a:srgbClr val="756D79"/>
-                </a:solidFill>
-                <a:latin typeface="Montserrat" pitchFamily="34" charset="0"/>
-                <a:ea typeface="Montserrat" pitchFamily="34" charset="-122"/>
-                <a:cs typeface="Montserrat" pitchFamily="34" charset="-120"/>
-              </a:rPr>
-              <a:t>Today, Bonnie continues this work through RxVP, a global speakers bureau that curates panels for experienced and emerging speakers.</a:t>
-            </a:r>
-            <a:endParaRPr lang="en-US" sz="720" dirty="0"/>
+              <a:rPr lang="en-US" sz="920" b="1" dirty="0">
+                <a:solidFill>
+                  <a:srgbClr val="241F27"/>
+                </a:solidFill>
+                <a:latin typeface="Montserrat" pitchFamily="34" charset="0"/>
+                <a:ea typeface="Montserrat" pitchFamily="34" charset="-122"/>
+                <a:cs typeface="Montserrat" pitchFamily="34" charset="-120"/>
+              </a:rPr>
+              <a:t>• Engage diverse audiences with authenticity and authority</a:t>
+            </a:r>
+            <a:endParaRPr lang="en-US" sz="920" dirty="0"/>
+          </a:p>
+          <a:p>
+            <a:pPr algn="l" indent="0" marL="0">
+              <a:buNone/>
+            </a:pPr>
+            <a:r>
+              <a:rPr lang="en-US" sz="920" b="1" dirty="0">
+                <a:solidFill>
+                  <a:srgbClr val="241F27"/>
+                </a:solidFill>
+                <a:latin typeface="Montserrat" pitchFamily="34" charset="0"/>
+                <a:ea typeface="Montserrat" pitchFamily="34" charset="-122"/>
+                <a:cs typeface="Montserrat" pitchFamily="34" charset="-120"/>
+              </a:rPr>
+              <a:t>• Represent your company with thought leadership impact</a:t>
+            </a:r>
+            <a:endParaRPr lang="en-US" sz="920" dirty="0"/>
+          </a:p>
+          <a:p>
+            <a:pPr algn="l" indent="0" marL="0">
+              <a:buNone/>
+            </a:pPr>
+            <a:r>
+              <a:rPr lang="en-US" sz="920" b="1" dirty="0">
+                <a:solidFill>
+                  <a:srgbClr val="241F27"/>
+                </a:solidFill>
+                <a:latin typeface="Montserrat" pitchFamily="34" charset="0"/>
+                <a:ea typeface="Montserrat" pitchFamily="34" charset="-122"/>
+                <a:cs typeface="Montserrat" pitchFamily="34" charset="-120"/>
+              </a:rPr>
+              <a:t>• Navigate panel discussions and live Q&amp;A with agility and confidence</a:t>
+            </a:r>
+            <a:endParaRPr lang="en-US" sz="920" dirty="0"/>
           </a:p>
         </p:txBody>
       </p:sp>
@@ -2571,14 +2350,39 @@
       </p:sp>
       <p:sp>
         <p:nvSpPr>
-          <p:cNvPr id="6" name="Text 3"/>
-          <p:cNvSpPr/>
-          <p:nvPr/>
-        </p:nvSpPr>
-        <p:spPr>
-          <a:xfrm>
-            <a:off x="512064" y="2578608"/>
-            <a:ext cx="2971800" cy="182880"/>
+          <p:cNvPr id="6" name="Shape 3"/>
+          <p:cNvSpPr/>
+          <p:nvPr/>
+        </p:nvSpPr>
+        <p:spPr>
+          <a:xfrm>
+            <a:off x="512064" y="2331720"/>
+            <a:ext cx="6748272" cy="4590288"/>
+          </a:xfrm>
+          <a:prstGeom prst="rect">
+            <a:avLst/>
+          </a:prstGeom>
+          <a:solidFill>
+            <a:srgbClr val="FBF8ED"/>
+          </a:solidFill>
+          <a:ln w="12700">
+            <a:solidFill>
+              <a:srgbClr val="D7C07A"/>
+            </a:solidFill>
+            <a:prstDash val="solid"/>
+          </a:ln>
+        </p:spPr>
+      </p:sp>
+      <p:sp>
+        <p:nvSpPr>
+          <p:cNvPr id="7" name="Text 4"/>
+          <p:cNvSpPr/>
+          <p:nvPr/>
+        </p:nvSpPr>
+        <p:spPr>
+          <a:xfrm>
+            <a:off x="658368" y="2450592"/>
+            <a:ext cx="3291840" cy="164592"/>
           </a:xfrm>
           <a:prstGeom prst="rect">
             <a:avLst/>
@@ -2604,7 +2408,7 @@
                 <a:ea typeface="Montserrat" pitchFamily="34" charset="-122"/>
                 <a:cs typeface="Montserrat" pitchFamily="34" charset="-120"/>
               </a:rPr>
-              <a:t>PROGRAM OBJECTIVES</a:t>
+              <a:t>OUR PRACTITIONER COACHES</a:t>
             </a:r>
             <a:endParaRPr lang="en-US" sz="980" dirty="0"/>
           </a:p>
@@ -2612,140 +2416,14 @@
       </p:sp>
       <p:sp>
         <p:nvSpPr>
-          <p:cNvPr id="7" name="Text 4"/>
-          <p:cNvSpPr/>
-          <p:nvPr/>
-        </p:nvSpPr>
-        <p:spPr>
-          <a:xfrm>
-            <a:off x="512064" y="2889504"/>
-            <a:ext cx="3246120" cy="2011680"/>
-          </a:xfrm>
-          <a:prstGeom prst="rect">
-            <a:avLst/>
-          </a:prstGeom>
-          <a:noFill/>
-          <a:ln/>
-        </p:spPr>
-        <p:txBody>
-          <a:bodyPr wrap="square" lIns="254" tIns="254" rIns="254" bIns="254" rtlCol="0" anchor="t">
-            <a:normAutofit/>
-          </a:bodyPr>
-          <a:lstStyle/>
-          <a:p>
-            <a:pPr algn="l" indent="0" marL="0">
-              <a:buNone/>
-            </a:pPr>
-            <a:r>
-              <a:rPr lang="en-US" sz="890" b="1" dirty="0">
-                <a:solidFill>
-                  <a:srgbClr val="241F27"/>
-                </a:solidFill>
-                <a:latin typeface="Montserrat" pitchFamily="34" charset="0"/>
-                <a:ea typeface="Montserrat" pitchFamily="34" charset="-122"/>
-                <a:cs typeface="Montserrat" pitchFamily="34" charset="-120"/>
-              </a:rPr>
-              <a:t>• Communicate with executive-level confidence and credibility in internal meetings</a:t>
-            </a:r>
-            <a:endParaRPr lang="en-US" sz="890" dirty="0"/>
-          </a:p>
-          <a:p>
-            <a:pPr algn="l" indent="0" marL="0">
-              <a:buNone/>
-            </a:pPr>
-            <a:r>
-              <a:rPr lang="en-US" sz="890" b="1" dirty="0">
-                <a:solidFill>
-                  <a:srgbClr val="241F27"/>
-                </a:solidFill>
-                <a:latin typeface="Montserrat" pitchFamily="34" charset="0"/>
-                <a:ea typeface="Montserrat" pitchFamily="34" charset="-122"/>
-                <a:cs typeface="Montserrat" pitchFamily="34" charset="-120"/>
-              </a:rPr>
-              <a:t>• Strengthen leadership presence in high-visibility forums</a:t>
-            </a:r>
-            <a:endParaRPr lang="en-US" sz="890" dirty="0"/>
-          </a:p>
-          <a:p>
-            <a:pPr algn="l" indent="0" marL="0">
-              <a:buNone/>
-            </a:pPr>
-            <a:r>
-              <a:rPr lang="en-US" sz="890" b="1" dirty="0">
-                <a:solidFill>
-                  <a:srgbClr val="241F27"/>
-                </a:solidFill>
-                <a:latin typeface="Montserrat" pitchFamily="34" charset="0"/>
-                <a:ea typeface="Montserrat" pitchFamily="34" charset="-122"/>
-                <a:cs typeface="Montserrat" pitchFamily="34" charset="-120"/>
-              </a:rPr>
-              <a:t>• Deliver clear, concise, and compelling messages under pressure</a:t>
-            </a:r>
-            <a:endParaRPr lang="en-US" sz="890" dirty="0"/>
-          </a:p>
-          <a:p>
-            <a:pPr algn="l" indent="0" marL="0">
-              <a:buNone/>
-            </a:pPr>
-            <a:r>
-              <a:rPr lang="en-US" sz="890" b="1" dirty="0">
-                <a:solidFill>
-                  <a:srgbClr val="241F27"/>
-                </a:solidFill>
-                <a:latin typeface="Montserrat" pitchFamily="34" charset="0"/>
-                <a:ea typeface="Montserrat" pitchFamily="34" charset="-122"/>
-                <a:cs typeface="Montserrat" pitchFamily="34" charset="-120"/>
-              </a:rPr>
-              <a:t>• Engage diverse audiences with authenticity and authority</a:t>
-            </a:r>
-            <a:endParaRPr lang="en-US" sz="890" dirty="0"/>
-          </a:p>
-          <a:p>
-            <a:pPr algn="l" indent="0" marL="0">
-              <a:buNone/>
-            </a:pPr>
-            <a:r>
-              <a:rPr lang="en-US" sz="890" b="1" dirty="0">
-                <a:solidFill>
-                  <a:srgbClr val="241F27"/>
-                </a:solidFill>
-                <a:latin typeface="Montserrat" pitchFamily="34" charset="0"/>
-                <a:ea typeface="Montserrat" pitchFamily="34" charset="-122"/>
-                <a:cs typeface="Montserrat" pitchFamily="34" charset="-120"/>
-              </a:rPr>
-              <a:t>• Represent your company with thought leadership impact</a:t>
-            </a:r>
-            <a:endParaRPr lang="en-US" sz="890" dirty="0"/>
-          </a:p>
-          <a:p>
-            <a:pPr algn="l" indent="0" marL="0">
-              <a:buNone/>
-            </a:pPr>
-            <a:r>
-              <a:rPr lang="en-US" sz="890" b="1" dirty="0">
-                <a:solidFill>
-                  <a:srgbClr val="241F27"/>
-                </a:solidFill>
-                <a:latin typeface="Montserrat" pitchFamily="34" charset="0"/>
-                <a:ea typeface="Montserrat" pitchFamily="34" charset="-122"/>
-                <a:cs typeface="Montserrat" pitchFamily="34" charset="-120"/>
-              </a:rPr>
-              <a:t>• Navigate panel discussions and live Q&amp;A with agility and confidence</a:t>
-            </a:r>
-            <a:endParaRPr lang="en-US" sz="890" dirty="0"/>
-          </a:p>
-        </p:txBody>
-      </p:sp>
-      <p:sp>
-        <p:nvSpPr>
           <p:cNvPr id="8" name="Text 5"/>
           <p:cNvSpPr/>
           <p:nvPr/>
         </p:nvSpPr>
         <p:spPr>
           <a:xfrm>
-            <a:off x="4059936" y="2578608"/>
-            <a:ext cx="3017520" cy="182880"/>
+            <a:off x="658368" y="2724912"/>
+            <a:ext cx="3063240" cy="228600"/>
           </a:xfrm>
           <a:prstGeom prst="rect">
             <a:avLst/>
@@ -2763,276 +2441,30 @@
               <a:buNone/>
             </a:pPr>
             <a:r>
-              <a:rPr lang="en-US" sz="980" b="1" dirty="0">
+              <a:rPr lang="en-US" sz="1450" b="1" dirty="0">
                 <a:solidFill>
                   <a:srgbClr val="4A075C"/>
                 </a:solidFill>
-                <a:latin typeface="Montserrat" pitchFamily="34" charset="0"/>
-                <a:ea typeface="Montserrat" pitchFamily="34" charset="-122"/>
-                <a:cs typeface="Montserrat" pitchFamily="34" charset="-120"/>
-              </a:rPr>
-              <a:t>SIGNATURE DEVELOPMENT AREAS</a:t>
-            </a:r>
-            <a:endParaRPr lang="en-US" sz="980" dirty="0"/>
-          </a:p>
-        </p:txBody>
-      </p:sp>
-      <p:sp>
-        <p:nvSpPr>
-          <p:cNvPr id="9" name="Text 6"/>
-          <p:cNvSpPr/>
-          <p:nvPr/>
-        </p:nvSpPr>
-        <p:spPr>
-          <a:xfrm>
-            <a:off x="4059936" y="2889504"/>
-            <a:ext cx="3063240" cy="164592"/>
-          </a:xfrm>
-          <a:prstGeom prst="rect">
-            <a:avLst/>
-          </a:prstGeom>
-          <a:noFill/>
-          <a:ln/>
-        </p:spPr>
-        <p:txBody>
-          <a:bodyPr wrap="square" lIns="127" tIns="127" rIns="127" bIns="127" rtlCol="0" anchor="t">
-            <a:normAutofit/>
-          </a:bodyPr>
-          <a:lstStyle/>
-          <a:p>
-            <a:pPr algn="l" indent="0" marL="0">
-              <a:buNone/>
-            </a:pPr>
-            <a:r>
-              <a:rPr lang="en-US" sz="980" b="1" dirty="0">
-                <a:solidFill>
-                  <a:srgbClr val="4A075C"/>
-                </a:solidFill>
-                <a:latin typeface="Montserrat" pitchFamily="34" charset="0"/>
-                <a:ea typeface="Montserrat" pitchFamily="34" charset="-122"/>
-                <a:cs typeface="Montserrat" pitchFamily="34" charset="-120"/>
-              </a:rPr>
-              <a:t>Executive Presence Mastery</a:t>
-            </a:r>
-            <a:endParaRPr lang="en-US" sz="980" dirty="0"/>
-          </a:p>
-        </p:txBody>
-      </p:sp>
-      <p:sp>
-        <p:nvSpPr>
-          <p:cNvPr id="10" name="Text 7"/>
-          <p:cNvSpPr/>
-          <p:nvPr/>
-        </p:nvSpPr>
-        <p:spPr>
-          <a:xfrm>
-            <a:off x="4059936" y="3127248"/>
-            <a:ext cx="3063240" cy="402336"/>
-          </a:xfrm>
-          <a:prstGeom prst="rect">
-            <a:avLst/>
-          </a:prstGeom>
-          <a:noFill/>
-          <a:ln/>
-        </p:spPr>
-        <p:txBody>
-          <a:bodyPr wrap="square" lIns="127" tIns="127" rIns="127" bIns="127" rtlCol="0" anchor="t">
-            <a:normAutofit/>
-          </a:bodyPr>
-          <a:lstStyle/>
-          <a:p>
-            <a:pPr algn="l" indent="0" marL="0">
-              <a:buNone/>
-            </a:pPr>
-            <a:r>
-              <a:rPr lang="en-US" sz="890" b="1" dirty="0">
-                <a:solidFill>
-                  <a:srgbClr val="5F5863"/>
-                </a:solidFill>
-                <a:latin typeface="Montserrat" pitchFamily="34" charset="0"/>
-                <a:ea typeface="Montserrat" pitchFamily="34" charset="-122"/>
-                <a:cs typeface="Montserrat" pitchFamily="34" charset="-120"/>
-              </a:rPr>
-              <a:t>Participants strengthen the core qualities that help leaders command attention, build trust, and inspire confidence.</a:t>
-            </a:r>
-            <a:endParaRPr lang="en-US" sz="890" dirty="0"/>
-          </a:p>
-        </p:txBody>
-      </p:sp>
-      <p:sp>
-        <p:nvSpPr>
-          <p:cNvPr id="11" name="Text 8"/>
-          <p:cNvSpPr/>
-          <p:nvPr/>
-        </p:nvSpPr>
-        <p:spPr>
-          <a:xfrm>
-            <a:off x="4059936" y="3749040"/>
-            <a:ext cx="3063240" cy="164592"/>
-          </a:xfrm>
-          <a:prstGeom prst="rect">
-            <a:avLst/>
-          </a:prstGeom>
-          <a:noFill/>
-          <a:ln/>
-        </p:spPr>
-        <p:txBody>
-          <a:bodyPr wrap="square" lIns="127" tIns="127" rIns="127" bIns="127" rtlCol="0" anchor="t">
-            <a:normAutofit/>
-          </a:bodyPr>
-          <a:lstStyle/>
-          <a:p>
-            <a:pPr algn="l" indent="0" marL="0">
-              <a:buNone/>
-            </a:pPr>
-            <a:r>
-              <a:rPr lang="en-US" sz="980" b="1" dirty="0">
-                <a:solidFill>
-                  <a:srgbClr val="4A075C"/>
-                </a:solidFill>
-                <a:latin typeface="Montserrat" pitchFamily="34" charset="0"/>
-                <a:ea typeface="Montserrat" pitchFamily="34" charset="-122"/>
-                <a:cs typeface="Montserrat" pitchFamily="34" charset="-120"/>
-              </a:rPr>
-              <a:t>Strategic Public Speaking Excellence</a:t>
-            </a:r>
-            <a:endParaRPr lang="en-US" sz="980" dirty="0"/>
-          </a:p>
-        </p:txBody>
-      </p:sp>
-      <p:sp>
-        <p:nvSpPr>
-          <p:cNvPr id="12" name="Text 9"/>
-          <p:cNvSpPr/>
-          <p:nvPr/>
-        </p:nvSpPr>
-        <p:spPr>
-          <a:xfrm>
-            <a:off x="4059936" y="3986784"/>
-            <a:ext cx="3063240" cy="402336"/>
-          </a:xfrm>
-          <a:prstGeom prst="rect">
-            <a:avLst/>
-          </a:prstGeom>
-          <a:noFill/>
-          <a:ln/>
-        </p:spPr>
-        <p:txBody>
-          <a:bodyPr wrap="square" lIns="127" tIns="127" rIns="127" bIns="127" rtlCol="0" anchor="t">
-            <a:normAutofit/>
-          </a:bodyPr>
-          <a:lstStyle/>
-          <a:p>
-            <a:pPr algn="l" indent="0" marL="0">
-              <a:buNone/>
-            </a:pPr>
-            <a:r>
-              <a:rPr lang="en-US" sz="890" b="1" dirty="0">
-                <a:solidFill>
-                  <a:srgbClr val="5F5863"/>
-                </a:solidFill>
-                <a:latin typeface="Montserrat" pitchFamily="34" charset="0"/>
-                <a:ea typeface="Montserrat" pitchFamily="34" charset="-122"/>
-                <a:cs typeface="Montserrat" pitchFamily="34" charset="-120"/>
-              </a:rPr>
-              <a:t>Focused coaching helps participants turn ideas into compelling messages that resonate and move audiences to action.</a:t>
-            </a:r>
-            <a:endParaRPr lang="en-US" sz="890" dirty="0"/>
-          </a:p>
-        </p:txBody>
-      </p:sp>
-      <p:sp>
-        <p:nvSpPr>
-          <p:cNvPr id="13" name="Text 10"/>
-          <p:cNvSpPr/>
-          <p:nvPr/>
-        </p:nvSpPr>
-        <p:spPr>
-          <a:xfrm>
-            <a:off x="4059936" y="4608576"/>
-            <a:ext cx="3063240" cy="164592"/>
-          </a:xfrm>
-          <a:prstGeom prst="rect">
-            <a:avLst/>
-          </a:prstGeom>
-          <a:noFill/>
-          <a:ln/>
-        </p:spPr>
-        <p:txBody>
-          <a:bodyPr wrap="square" lIns="127" tIns="127" rIns="127" bIns="127" rtlCol="0" anchor="t">
-            <a:normAutofit/>
-          </a:bodyPr>
-          <a:lstStyle/>
-          <a:p>
-            <a:pPr algn="l" indent="0" marL="0">
-              <a:buNone/>
-            </a:pPr>
-            <a:r>
-              <a:rPr lang="en-US" sz="980" b="1" dirty="0">
-                <a:solidFill>
-                  <a:srgbClr val="4A075C"/>
-                </a:solidFill>
-                <a:latin typeface="Montserrat" pitchFamily="34" charset="0"/>
-                <a:ea typeface="Montserrat" pitchFamily="34" charset="-122"/>
-                <a:cs typeface="Montserrat" pitchFamily="34" charset="-120"/>
-              </a:rPr>
-              <a:t>Panel and Fireside Chat Readiness</a:t>
-            </a:r>
-            <a:endParaRPr lang="en-US" sz="980" dirty="0"/>
-          </a:p>
-        </p:txBody>
-      </p:sp>
-      <p:sp>
-        <p:nvSpPr>
-          <p:cNvPr id="14" name="Text 11"/>
-          <p:cNvSpPr/>
-          <p:nvPr/>
-        </p:nvSpPr>
-        <p:spPr>
-          <a:xfrm>
-            <a:off x="4059936" y="4846320"/>
-            <a:ext cx="3063240" cy="402336"/>
-          </a:xfrm>
-          <a:prstGeom prst="rect">
-            <a:avLst/>
-          </a:prstGeom>
-          <a:noFill/>
-          <a:ln/>
-        </p:spPr>
-        <p:txBody>
-          <a:bodyPr wrap="square" lIns="127" tIns="127" rIns="127" bIns="127" rtlCol="0" anchor="t">
-            <a:normAutofit/>
-          </a:bodyPr>
-          <a:lstStyle/>
-          <a:p>
-            <a:pPr algn="l" indent="0" marL="0">
-              <a:buNone/>
-            </a:pPr>
-            <a:r>
-              <a:rPr lang="en-US" sz="890" b="1" dirty="0">
-                <a:solidFill>
-                  <a:srgbClr val="5F5863"/>
-                </a:solidFill>
-                <a:latin typeface="Montserrat" pitchFamily="34" charset="0"/>
-                <a:ea typeface="Montserrat" pitchFamily="34" charset="-122"/>
-                <a:cs typeface="Montserrat" pitchFamily="34" charset="-120"/>
-              </a:rPr>
-              <a:t>Participants gain practical tools to show up with poise, insight, and agility in high-visibility speaking moments.</a:t>
-            </a:r>
-            <a:endParaRPr lang="en-US" sz="890" dirty="0"/>
-          </a:p>
-        </p:txBody>
-      </p:sp>
-      <p:sp>
-        <p:nvSpPr>
-          <p:cNvPr id="15" name="Shape 12"/>
-          <p:cNvSpPr/>
-          <p:nvPr/>
-        </p:nvSpPr>
-        <p:spPr>
-          <a:xfrm>
-            <a:off x="512064" y="5577840"/>
-            <a:ext cx="6748272" cy="0"/>
+                <a:latin typeface="Cormorant Garamond" pitchFamily="34" charset="0"/>
+                <a:ea typeface="Cormorant Garamond" pitchFamily="34" charset="-122"/>
+                <a:cs typeface="Cormorant Garamond" pitchFamily="34" charset="-120"/>
+              </a:rPr>
+              <a:t>Deepa Desai</a:t>
+            </a:r>
+            <a:endParaRPr lang="en-US" sz="1450" dirty="0"/>
+          </a:p>
+        </p:txBody>
+      </p:sp>
+      <p:sp>
+        <p:nvSpPr>
+          <p:cNvPr id="9" name="Shape 6"/>
+          <p:cNvSpPr/>
+          <p:nvPr/>
+        </p:nvSpPr>
+        <p:spPr>
+          <a:xfrm>
+            <a:off x="658368" y="3044952"/>
+            <a:ext cx="2999232" cy="0"/>
           </a:xfrm>
           <a:prstGeom prst="line">
             <a:avLst/>
@@ -3048,14 +2480,14 @@
       </p:sp>
       <p:sp>
         <p:nvSpPr>
-          <p:cNvPr id="16" name="Text 13"/>
-          <p:cNvSpPr/>
-          <p:nvPr/>
-        </p:nvSpPr>
-        <p:spPr>
-          <a:xfrm>
-            <a:off x="512064" y="5779008"/>
-            <a:ext cx="2971800" cy="164592"/>
+          <p:cNvPr id="10" name="Text 7"/>
+          <p:cNvSpPr/>
+          <p:nvPr/>
+        </p:nvSpPr>
+        <p:spPr>
+          <a:xfrm>
+            <a:off x="658368" y="3136392"/>
+            <a:ext cx="3063240" cy="3621024"/>
           </a:xfrm>
           <a:prstGeom prst="rect">
             <a:avLst/>
@@ -3073,6 +2505,336 @@
               <a:buNone/>
             </a:pPr>
             <a:r>
+              <a:rPr lang="en-US" sz="860" b="1" dirty="0">
+                <a:solidFill>
+                  <a:srgbClr val="756D79"/>
+                </a:solidFill>
+                <a:latin typeface="Montserrat" pitchFamily="34" charset="0"/>
+                <a:ea typeface="Montserrat" pitchFamily="34" charset="-122"/>
+                <a:cs typeface="Montserrat" pitchFamily="34" charset="-120"/>
+              </a:rPr>
+              <a:t>Dr. Deepa Desai is a globally recognized healthcare executive, public speaker, leadership strategist, and executive presence advisor with more than 20 years of experience leading transformation across the life sciences sector.</a:t>
+            </a:r>
+            <a:endParaRPr lang="en-US" sz="860" dirty="0"/>
+          </a:p>
+          <a:p>
+            <a:pPr algn="l" indent="0" marL="0">
+              <a:buNone/>
+            </a:pPr>
+            <a:endParaRPr lang="en-US" sz="860" dirty="0"/>
+          </a:p>
+          <a:p>
+            <a:pPr algn="l" indent="0" marL="0">
+              <a:buNone/>
+            </a:pPr>
+            <a:r>
+              <a:rPr lang="en-US" sz="860" b="1" dirty="0">
+                <a:solidFill>
+                  <a:srgbClr val="756D79"/>
+                </a:solidFill>
+                <a:latin typeface="Montserrat" pitchFamily="34" charset="0"/>
+                <a:ea typeface="Montserrat" pitchFamily="34" charset="-122"/>
+                <a:cs typeface="Montserrat" pitchFamily="34" charset="-120"/>
+              </a:rPr>
+              <a:t>She serves as Founder and CEO of D Cube Consultancy, Head of Asia Pacific for RxVP, Global Board Director at the Healthcare Businesswomen's Association, and has held numerous VP roles in major corporations.</a:t>
+            </a:r>
+            <a:endParaRPr lang="en-US" sz="860" dirty="0"/>
+          </a:p>
+          <a:p>
+            <a:pPr algn="l" indent="0" marL="0">
+              <a:buNone/>
+            </a:pPr>
+            <a:endParaRPr lang="en-US" sz="860" dirty="0"/>
+          </a:p>
+          <a:p>
+            <a:pPr algn="l" indent="0" marL="0">
+              <a:buNone/>
+            </a:pPr>
+            <a:r>
+              <a:rPr lang="en-US" sz="860" b="1" dirty="0">
+                <a:solidFill>
+                  <a:srgbClr val="756D79"/>
+                </a:solidFill>
+                <a:latin typeface="Montserrat" pitchFamily="34" charset="0"/>
+                <a:ea typeface="Montserrat" pitchFamily="34" charset="-122"/>
+                <a:cs typeface="Montserrat" pitchFamily="34" charset="-120"/>
+              </a:rPr>
+              <a:t>Through these leadership roles, she helps emerging leaders strengthen executive presence, elevate strategic communication, and speak with confidence, credibility, and influence.</a:t>
+            </a:r>
+            <a:endParaRPr lang="en-US" sz="860" dirty="0"/>
+          </a:p>
+          <a:p>
+            <a:pPr algn="l" indent="0" marL="0">
+              <a:buNone/>
+            </a:pPr>
+            <a:endParaRPr lang="en-US" sz="860" dirty="0"/>
+          </a:p>
+          <a:p>
+            <a:pPr algn="l" indent="0" marL="0">
+              <a:buNone/>
+            </a:pPr>
+            <a:r>
+              <a:rPr lang="en-US" sz="860" b="1" dirty="0">
+                <a:solidFill>
+                  <a:srgbClr val="756D79"/>
+                </a:solidFill>
+                <a:latin typeface="Montserrat" pitchFamily="34" charset="0"/>
+                <a:ea typeface="Montserrat" pitchFamily="34" charset="-122"/>
+                <a:cs typeface="Montserrat" pitchFamily="34" charset="-120"/>
+              </a:rPr>
+              <a:t>Deepa is a frequent speaker at life sciences conferences and leadership forums across the United States and Europe. She has also expanded the Healthcare Businesswomen’s Association in India to a growing community of 700 members by building panels, summits, and chapters across the country.</a:t>
+            </a:r>
+            <a:endParaRPr lang="en-US" sz="860" dirty="0"/>
+          </a:p>
+        </p:txBody>
+      </p:sp>
+      <p:sp>
+        <p:nvSpPr>
+          <p:cNvPr id="11" name="Text 8"/>
+          <p:cNvSpPr/>
+          <p:nvPr/>
+        </p:nvSpPr>
+        <p:spPr>
+          <a:xfrm>
+            <a:off x="3822192" y="2724912"/>
+            <a:ext cx="3063240" cy="228600"/>
+          </a:xfrm>
+          <a:prstGeom prst="rect">
+            <a:avLst/>
+          </a:prstGeom>
+          <a:noFill/>
+          <a:ln/>
+        </p:spPr>
+        <p:txBody>
+          <a:bodyPr wrap="square" lIns="127" tIns="127" rIns="127" bIns="127" rtlCol="0" anchor="t">
+            <a:normAutofit/>
+          </a:bodyPr>
+          <a:lstStyle/>
+          <a:p>
+            <a:pPr algn="l" indent="0" marL="0">
+              <a:buNone/>
+            </a:pPr>
+            <a:r>
+              <a:rPr lang="en-US" sz="1450" b="1" dirty="0">
+                <a:solidFill>
+                  <a:srgbClr val="4A075C"/>
+                </a:solidFill>
+                <a:latin typeface="Cormorant Garamond" pitchFamily="34" charset="0"/>
+                <a:ea typeface="Cormorant Garamond" pitchFamily="34" charset="-122"/>
+                <a:cs typeface="Cormorant Garamond" pitchFamily="34" charset="-120"/>
+              </a:rPr>
+              <a:t>Bonnie Lappin</a:t>
+            </a:r>
+            <a:endParaRPr lang="en-US" sz="1450" dirty="0"/>
+          </a:p>
+        </p:txBody>
+      </p:sp>
+      <p:sp>
+        <p:nvSpPr>
+          <p:cNvPr id="12" name="Shape 9"/>
+          <p:cNvSpPr/>
+          <p:nvPr/>
+        </p:nvSpPr>
+        <p:spPr>
+          <a:xfrm>
+            <a:off x="3822192" y="3044952"/>
+            <a:ext cx="2999232" cy="0"/>
+          </a:xfrm>
+          <a:prstGeom prst="line">
+            <a:avLst/>
+          </a:prstGeom>
+          <a:noFill/>
+          <a:ln w="12700">
+            <a:solidFill>
+              <a:srgbClr val="DED2E2"/>
+            </a:solidFill>
+            <a:prstDash val="solid"/>
+          </a:ln>
+        </p:spPr>
+      </p:sp>
+      <p:sp>
+        <p:nvSpPr>
+          <p:cNvPr id="13" name="Text 10"/>
+          <p:cNvSpPr/>
+          <p:nvPr/>
+        </p:nvSpPr>
+        <p:spPr>
+          <a:xfrm>
+            <a:off x="3822192" y="3136392"/>
+            <a:ext cx="3063240" cy="3621024"/>
+          </a:xfrm>
+          <a:prstGeom prst="rect">
+            <a:avLst/>
+          </a:prstGeom>
+          <a:noFill/>
+          <a:ln/>
+        </p:spPr>
+        <p:txBody>
+          <a:bodyPr wrap="square" lIns="127" tIns="127" rIns="127" bIns="127" rtlCol="0" anchor="t">
+            <a:normAutofit/>
+          </a:bodyPr>
+          <a:lstStyle/>
+          <a:p>
+            <a:pPr algn="l" indent="0" marL="0">
+              <a:buNone/>
+            </a:pPr>
+            <a:r>
+              <a:rPr lang="en-US" sz="860" b="1" dirty="0">
+                <a:solidFill>
+                  <a:srgbClr val="756D79"/>
+                </a:solidFill>
+                <a:latin typeface="Montserrat" pitchFamily="34" charset="0"/>
+                <a:ea typeface="Montserrat" pitchFamily="34" charset="-122"/>
+                <a:cs typeface="Montserrat" pitchFamily="34" charset="-120"/>
+              </a:rPr>
+              <a:t>Bonnie Lappin co-founded the Ambassador Program for the Healthcare Businesswomen's Association in 2013.</a:t>
+            </a:r>
+            <a:endParaRPr lang="en-US" sz="860" dirty="0"/>
+          </a:p>
+          <a:p>
+            <a:pPr algn="l" indent="0" marL="0">
+              <a:buNone/>
+            </a:pPr>
+            <a:endParaRPr lang="en-US" sz="860" dirty="0"/>
+          </a:p>
+          <a:p>
+            <a:pPr algn="l" indent="0" marL="0">
+              <a:buNone/>
+            </a:pPr>
+            <a:r>
+              <a:rPr lang="en-US" sz="860" b="1" dirty="0">
+                <a:solidFill>
+                  <a:srgbClr val="756D79"/>
+                </a:solidFill>
+                <a:latin typeface="Montserrat" pitchFamily="34" charset="0"/>
+                <a:ea typeface="Montserrat" pitchFamily="34" charset="-122"/>
+                <a:cs typeface="Montserrat" pitchFamily="34" charset="-120"/>
+              </a:rPr>
+              <a:t>Designed as a global leadership development program for HBA corporate partners, it grew under her leadership from 2013 to 2025 into a signature, often life-changing experience for more than 11,000 participants.</a:t>
+            </a:r>
+            <a:endParaRPr lang="en-US" sz="860" dirty="0"/>
+          </a:p>
+          <a:p>
+            <a:pPr algn="l" indent="0" marL="0">
+              <a:buNone/>
+            </a:pPr>
+            <a:endParaRPr lang="en-US" sz="860" dirty="0"/>
+          </a:p>
+          <a:p>
+            <a:pPr algn="l" indent="0" marL="0">
+              <a:buNone/>
+            </a:pPr>
+            <a:r>
+              <a:rPr lang="en-US" sz="860" b="1" dirty="0">
+                <a:solidFill>
+                  <a:srgbClr val="756D79"/>
+                </a:solidFill>
+                <a:latin typeface="Montserrat" pitchFamily="34" charset="0"/>
+                <a:ea typeface="Montserrat" pitchFamily="34" charset="-122"/>
+                <a:cs typeface="Montserrat" pitchFamily="34" charset="-120"/>
+              </a:rPr>
+              <a:t>Over those 12 years, Bonnie spoke frequently at life sciences companies across Austria, Belgium, Canada, France, Germany, India, Ireland, Italy, Japan, Malaysia, Singapore, Spain, Switzerland, and the United Kingdom.</a:t>
+            </a:r>
+            <a:endParaRPr lang="en-US" sz="860" dirty="0"/>
+          </a:p>
+          <a:p>
+            <a:pPr algn="l" indent="0" marL="0">
+              <a:buNone/>
+            </a:pPr>
+            <a:endParaRPr lang="en-US" sz="860" dirty="0"/>
+          </a:p>
+          <a:p>
+            <a:pPr algn="l" indent="0" marL="0">
+              <a:buNone/>
+            </a:pPr>
+            <a:r>
+              <a:rPr lang="en-US" sz="860" b="1" dirty="0">
+                <a:solidFill>
+                  <a:srgbClr val="756D79"/>
+                </a:solidFill>
+                <a:latin typeface="Montserrat" pitchFamily="34" charset="0"/>
+                <a:ea typeface="Montserrat" pitchFamily="34" charset="-122"/>
+                <a:cs typeface="Montserrat" pitchFamily="34" charset="-120"/>
+              </a:rPr>
+              <a:t>She also led panel development, launch and graduation events, and coached hundreds of panelists and moderators.</a:t>
+            </a:r>
+            <a:endParaRPr lang="en-US" sz="860" dirty="0"/>
+          </a:p>
+          <a:p>
+            <a:pPr algn="l" indent="0" marL="0">
+              <a:buNone/>
+            </a:pPr>
+            <a:endParaRPr lang="en-US" sz="860" dirty="0"/>
+          </a:p>
+          <a:p>
+            <a:pPr algn="l" indent="0" marL="0">
+              <a:buNone/>
+            </a:pPr>
+            <a:r>
+              <a:rPr lang="en-US" sz="860" b="1" dirty="0">
+                <a:solidFill>
+                  <a:srgbClr val="756D79"/>
+                </a:solidFill>
+                <a:latin typeface="Montserrat" pitchFamily="34" charset="0"/>
+                <a:ea typeface="Montserrat" pitchFamily="34" charset="-122"/>
+                <a:cs typeface="Montserrat" pitchFamily="34" charset="-120"/>
+              </a:rPr>
+              <a:t>Today, Bonnie continues this work through RxVP, a global speakers bureau that curates panels for experienced and emerging speakers.</a:t>
+            </a:r>
+            <a:endParaRPr lang="en-US" sz="860" dirty="0"/>
+          </a:p>
+        </p:txBody>
+      </p:sp>
+      <p:sp>
+        <p:nvSpPr>
+          <p:cNvPr id="14" name="Shape 11"/>
+          <p:cNvSpPr/>
+          <p:nvPr/>
+        </p:nvSpPr>
+        <p:spPr>
+          <a:xfrm>
+            <a:off x="512064" y="7059168"/>
+            <a:ext cx="6748272" cy="0"/>
+          </a:xfrm>
+          <a:prstGeom prst="line">
+            <a:avLst/>
+          </a:prstGeom>
+          <a:noFill/>
+          <a:ln w="12700">
+            <a:solidFill>
+              <a:srgbClr val="DED2E2"/>
+            </a:solidFill>
+            <a:prstDash val="solid"/>
+          </a:ln>
+        </p:spPr>
+      </p:sp>
+      <p:sp>
+        <p:nvSpPr>
+          <p:cNvPr id="15" name="Text 12"/>
+          <p:cNvSpPr/>
+          <p:nvPr/>
+        </p:nvSpPr>
+        <p:spPr>
+          <a:xfrm>
+            <a:off x="512064" y="7223760"/>
+            <a:ext cx="2971800" cy="164592"/>
+          </a:xfrm>
+          <a:prstGeom prst="rect">
+            <a:avLst/>
+          </a:prstGeom>
+          <a:noFill/>
+          <a:ln/>
+        </p:spPr>
+        <p:txBody>
+          <a:bodyPr wrap="square" lIns="127" tIns="127" rIns="127" bIns="127" rtlCol="0" anchor="t">
+            <a:normAutofit/>
+          </a:bodyPr>
+          <a:lstStyle/>
+          <a:p>
+            <a:pPr algn="l" indent="0" marL="0">
+              <a:buNone/>
+            </a:pPr>
+            <a:r>
               <a:rPr lang="en-US" sz="980" b="1" dirty="0">
                 <a:solidFill>
                   <a:srgbClr val="4A075C"/>
@@ -3089,14 +2851,14 @@
       </p:sp>
       <p:sp>
         <p:nvSpPr>
-          <p:cNvPr id="17" name="Text 14"/>
-          <p:cNvSpPr/>
-          <p:nvPr/>
-        </p:nvSpPr>
-        <p:spPr>
-          <a:xfrm>
-            <a:off x="512064" y="6053328"/>
-            <a:ext cx="3200400" cy="960120"/>
+          <p:cNvPr id="16" name="Text 13"/>
+          <p:cNvSpPr/>
+          <p:nvPr/>
+        </p:nvSpPr>
+        <p:spPr>
+          <a:xfrm>
+            <a:off x="512064" y="7479792"/>
+            <a:ext cx="3200400" cy="896112"/>
           </a:xfrm>
           <a:prstGeom prst="rect">
             <a:avLst/>
@@ -3114,7 +2876,7 @@
               <a:buNone/>
             </a:pPr>
             <a:r>
-              <a:rPr lang="en-US" sz="910" b="1" dirty="0">
+              <a:rPr lang="en-US" sz="920" b="1" dirty="0">
                 <a:solidFill>
                   <a:srgbClr val="241F27"/>
                 </a:solidFill>
@@ -3124,14 +2886,14 @@
               </a:rPr>
               <a:t>• Speaker delivery</a:t>
             </a:r>
-            <a:endParaRPr lang="en-US" sz="910" dirty="0"/>
-          </a:p>
-          <a:p>
-            <a:pPr algn="l" indent="0" marL="0">
-              <a:buNone/>
-            </a:pPr>
-            <a:r>
-              <a:rPr lang="en-US" sz="910" b="1" dirty="0">
+            <a:endParaRPr lang="en-US" sz="920" dirty="0"/>
+          </a:p>
+          <a:p>
+            <a:pPr algn="l" indent="0" marL="0">
+              <a:buNone/>
+            </a:pPr>
+            <a:r>
+              <a:rPr lang="en-US" sz="920" b="1" dirty="0">
                 <a:solidFill>
                   <a:srgbClr val="241F27"/>
                 </a:solidFill>
@@ -3141,14 +2903,14 @@
               </a:rPr>
               <a:t>• Concise storytelling</a:t>
             </a:r>
-            <a:endParaRPr lang="en-US" sz="910" dirty="0"/>
-          </a:p>
-          <a:p>
-            <a:pPr algn="l" indent="0" marL="0">
-              <a:buNone/>
-            </a:pPr>
-            <a:r>
-              <a:rPr lang="en-US" sz="910" b="1" dirty="0">
+            <a:endParaRPr lang="en-US" sz="920" dirty="0"/>
+          </a:p>
+          <a:p>
+            <a:pPr algn="l" indent="0" marL="0">
+              <a:buNone/>
+            </a:pPr>
+            <a:r>
+              <a:rPr lang="en-US" sz="920" b="1" dirty="0">
                 <a:solidFill>
                   <a:srgbClr val="241F27"/>
                 </a:solidFill>
@@ -3158,20 +2920,37 @@
               </a:rPr>
               <a:t>• Audience engagement</a:t>
             </a:r>
-            <a:endParaRPr lang="en-US" sz="910" dirty="0"/>
-          </a:p>
-        </p:txBody>
-      </p:sp>
-      <p:sp>
-        <p:nvSpPr>
-          <p:cNvPr id="18" name="Text 15"/>
-          <p:cNvSpPr/>
-          <p:nvPr/>
-        </p:nvSpPr>
-        <p:spPr>
-          <a:xfrm>
-            <a:off x="3886200" y="6053328"/>
-            <a:ext cx="3374136" cy="960120"/>
+            <a:endParaRPr lang="en-US" sz="920" dirty="0"/>
+          </a:p>
+          <a:p>
+            <a:pPr algn="l" indent="0" marL="0">
+              <a:buNone/>
+            </a:pPr>
+            <a:r>
+              <a:rPr lang="en-US" sz="920" b="1" dirty="0">
+                <a:solidFill>
+                  <a:srgbClr val="241F27"/>
+                </a:solidFill>
+                <a:latin typeface="Montserrat" pitchFamily="34" charset="0"/>
+                <a:ea typeface="Montserrat" pitchFamily="34" charset="-122"/>
+                <a:cs typeface="Montserrat" pitchFamily="34" charset="-120"/>
+              </a:rPr>
+              <a:t>• Mastering Q&amp;A</a:t>
+            </a:r>
+            <a:endParaRPr lang="en-US" sz="920" dirty="0"/>
+          </a:p>
+        </p:txBody>
+      </p:sp>
+      <p:sp>
+        <p:nvSpPr>
+          <p:cNvPr id="17" name="Text 14"/>
+          <p:cNvSpPr/>
+          <p:nvPr/>
+        </p:nvSpPr>
+        <p:spPr>
+          <a:xfrm>
+            <a:off x="3886200" y="7479792"/>
+            <a:ext cx="3374136" cy="896112"/>
           </a:xfrm>
           <a:prstGeom prst="rect">
             <a:avLst/>
@@ -3189,7 +2968,7 @@
               <a:buNone/>
             </a:pPr>
             <a:r>
-              <a:rPr lang="en-US" sz="910" b="1" dirty="0">
+              <a:rPr lang="en-US" sz="920" b="1" dirty="0">
                 <a:solidFill>
                   <a:srgbClr val="241F27"/>
                 </a:solidFill>
@@ -3199,14 +2978,14 @@
               </a:rPr>
               <a:t>• Appropriate self-effacing humor</a:t>
             </a:r>
-            <a:endParaRPr lang="en-US" sz="910" dirty="0"/>
-          </a:p>
-          <a:p>
-            <a:pPr algn="l" indent="0" marL="0">
-              <a:buNone/>
-            </a:pPr>
-            <a:r>
-              <a:rPr lang="en-US" sz="910" b="1" dirty="0">
+            <a:endParaRPr lang="en-US" sz="920" dirty="0"/>
+          </a:p>
+          <a:p>
+            <a:pPr algn="l" indent="0" marL="0">
+              <a:buNone/>
+            </a:pPr>
+            <a:r>
+              <a:rPr lang="en-US" sz="920" b="1" dirty="0">
                 <a:solidFill>
                   <a:srgbClr val="241F27"/>
                 </a:solidFill>
@@ -3216,14 +2995,14 @@
               </a:rPr>
               <a:t>• Engagement with panelists, moderators, and interviewers</a:t>
             </a:r>
-            <a:endParaRPr lang="en-US" sz="910" dirty="0"/>
-          </a:p>
-          <a:p>
-            <a:pPr algn="l" indent="0" marL="0">
-              <a:buNone/>
-            </a:pPr>
-            <a:r>
-              <a:rPr lang="en-US" sz="910" b="1" dirty="0">
+            <a:endParaRPr lang="en-US" sz="920" dirty="0"/>
+          </a:p>
+          <a:p>
+            <a:pPr algn="l" indent="0" marL="0">
+              <a:buNone/>
+            </a:pPr>
+            <a:r>
+              <a:rPr lang="en-US" sz="920" b="1" dirty="0">
                 <a:solidFill>
                   <a:srgbClr val="241F27"/>
                 </a:solidFill>
@@ -3233,20 +3012,20 @@
               </a:rPr>
               <a:t>• Enhanced executive presence</a:t>
             </a:r>
-            <a:endParaRPr lang="en-US" sz="910" dirty="0"/>
-          </a:p>
-        </p:txBody>
-      </p:sp>
-      <p:sp>
-        <p:nvSpPr>
-          <p:cNvPr id="19" name="Shape 16"/>
-          <p:cNvSpPr/>
-          <p:nvPr/>
-        </p:nvSpPr>
-        <p:spPr>
-          <a:xfrm>
-            <a:off x="512064" y="7269480"/>
-            <a:ext cx="6748272" cy="1417320"/>
+            <a:endParaRPr lang="en-US" sz="920" dirty="0"/>
+          </a:p>
+        </p:txBody>
+      </p:sp>
+      <p:sp>
+        <p:nvSpPr>
+          <p:cNvPr id="18" name="Shape 15"/>
+          <p:cNvSpPr/>
+          <p:nvPr/>
+        </p:nvSpPr>
+        <p:spPr>
+          <a:xfrm>
+            <a:off x="512064" y="8458200"/>
+            <a:ext cx="6748272" cy="841248"/>
           </a:xfrm>
           <a:prstGeom prst="rect">
             <a:avLst/>
@@ -3266,14 +3045,14 @@
       </p:sp>
       <p:sp>
         <p:nvSpPr>
-          <p:cNvPr id="20" name="Shape 17"/>
-          <p:cNvSpPr/>
-          <p:nvPr/>
-        </p:nvSpPr>
-        <p:spPr>
-          <a:xfrm>
-            <a:off x="512064" y="7269480"/>
-            <a:ext cx="36576" cy="1417320"/>
+          <p:cNvPr id="19" name="Shape 16"/>
+          <p:cNvSpPr/>
+          <p:nvPr/>
+        </p:nvSpPr>
+        <p:spPr>
+          <a:xfrm>
+            <a:off x="512064" y="8458200"/>
+            <a:ext cx="36576" cy="841248"/>
           </a:xfrm>
           <a:prstGeom prst="rect">
             <a:avLst/>
@@ -3293,13 +3072,13 @@
       </p:sp>
       <p:sp>
         <p:nvSpPr>
-          <p:cNvPr id="21" name="Text 18"/>
-          <p:cNvSpPr/>
-          <p:nvPr/>
-        </p:nvSpPr>
-        <p:spPr>
-          <a:xfrm>
-            <a:off x="731520" y="7443216"/>
+          <p:cNvPr id="20" name="Text 17"/>
+          <p:cNvSpPr/>
+          <p:nvPr/>
+        </p:nvSpPr>
+        <p:spPr>
+          <a:xfrm>
+            <a:off x="731520" y="8558784"/>
             <a:ext cx="5943600" cy="164592"/>
           </a:xfrm>
           <a:prstGeom prst="rect">
@@ -3334,14 +3113,14 @@
       </p:sp>
       <p:sp>
         <p:nvSpPr>
-          <p:cNvPr id="22" name="Text 19"/>
-          <p:cNvSpPr/>
-          <p:nvPr/>
-        </p:nvSpPr>
-        <p:spPr>
-          <a:xfrm>
-            <a:off x="731520" y="7717536"/>
-            <a:ext cx="3200400" cy="877824"/>
+          <p:cNvPr id="21" name="Text 18"/>
+          <p:cNvSpPr/>
+          <p:nvPr/>
+        </p:nvSpPr>
+        <p:spPr>
+          <a:xfrm>
+            <a:off x="731520" y="8796528"/>
+            <a:ext cx="3200400" cy="502920"/>
           </a:xfrm>
           <a:prstGeom prst="rect">
             <a:avLst/>
@@ -3409,14 +3188,14 @@
       </p:sp>
       <p:sp>
         <p:nvSpPr>
-          <p:cNvPr id="23" name="Text 20"/>
-          <p:cNvSpPr/>
-          <p:nvPr/>
-        </p:nvSpPr>
-        <p:spPr>
-          <a:xfrm>
-            <a:off x="3886200" y="7717536"/>
-            <a:ext cx="3291840" cy="877824"/>
+          <p:cNvPr id="22" name="Text 19"/>
+          <p:cNvSpPr/>
+          <p:nvPr/>
+        </p:nvSpPr>
+        <p:spPr>
+          <a:xfrm>
+            <a:off x="3886200" y="8796528"/>
+            <a:ext cx="3291840" cy="502920"/>
           </a:xfrm>
           <a:prstGeom prst="rect">
             <a:avLst/>
@@ -3467,7 +3246,7 @@
       </p:sp>
       <p:sp>
         <p:nvSpPr>
-          <p:cNvPr id="24" name="Shape 21"/>
+          <p:cNvPr id="23" name="Shape 20"/>
           <p:cNvSpPr/>
           <p:nvPr/>
         </p:nvSpPr>
@@ -3490,7 +3269,7 @@
       </p:sp>
       <p:sp>
         <p:nvSpPr>
-          <p:cNvPr id="25" name="Text 22"/>
+          <p:cNvPr id="24" name="Text 21"/>
           <p:cNvSpPr/>
           <p:nvPr/>
         </p:nvSpPr>
@@ -3531,7 +3310,7 @@
       </p:sp>
       <p:sp>
         <p:nvSpPr>
-          <p:cNvPr id="26" name="Text 23"/>
+          <p:cNvPr id="25" name="Text 22"/>
           <p:cNvSpPr/>
           <p:nvPr/>
         </p:nvSpPr>
